--- a/docs/pptx/carbo/ritu-carbo-linsubhr-egfrdisc-aki2.pptx
+++ b/docs/pptx/carbo/ritu-carbo-linsubhr-egfrdisc-aki2.pptx
@@ -2443,7 +2443,7 @@
           </p:nvSpPr>
           <p:spPr>
             <a:xfrm>
-              <a:off x="1810493" y="2073503"/>
+              <a:off x="1813815" y="2073503"/>
               <a:ext cx="0" cy="3649639"/>
             </a:xfrm>
             <a:custGeom>
@@ -2486,7 +2486,7 @@
           </p:nvSpPr>
           <p:spPr>
             <a:xfrm>
-              <a:off x="4291851" y="2073503"/>
+              <a:off x="4291714" y="2073503"/>
               <a:ext cx="0" cy="3649639"/>
             </a:xfrm>
             <a:custGeom>
@@ -2529,7 +2529,7 @@
           </p:nvSpPr>
           <p:spPr>
             <a:xfrm>
-              <a:off x="6773208" y="2073503"/>
+              <a:off x="6769614" y="2073503"/>
               <a:ext cx="0" cy="3649639"/>
             </a:xfrm>
             <a:custGeom>
@@ -2787,7 +2787,7 @@
           </p:nvSpPr>
           <p:spPr>
             <a:xfrm>
-              <a:off x="3051172" y="2073503"/>
+              <a:off x="3052764" y="2073503"/>
               <a:ext cx="0" cy="3649639"/>
             </a:xfrm>
             <a:custGeom>
@@ -2830,7 +2830,7 @@
           </p:nvSpPr>
           <p:spPr>
             <a:xfrm>
-              <a:off x="5532530" y="2073503"/>
+              <a:off x="5530664" y="2073503"/>
               <a:ext cx="0" cy="3649639"/>
             </a:xfrm>
             <a:custGeom>
@@ -2873,7 +2873,7 @@
           </p:nvSpPr>
           <p:spPr>
             <a:xfrm>
-              <a:off x="8013887" y="2073503"/>
+              <a:off x="8008563" y="2073503"/>
               <a:ext cx="0" cy="3649639"/>
             </a:xfrm>
             <a:custGeom>
@@ -2916,441 +2916,438 @@
           </p:nvSpPr>
           <p:spPr>
             <a:xfrm>
-              <a:off x="1510135" y="2073503"/>
-              <a:ext cx="6752543" cy="3479692"/>
+              <a:off x="1535367" y="2073503"/>
+              <a:ext cx="6727312" cy="3479559"/>
             </a:xfrm>
             <a:custGeom>
               <a:avLst/>
               <a:pathLst>
-                <a:path w="6752543" h="3479692">
+                <a:path w="6727312" h="3479559">
                   <a:moveTo>
-                    <a:pt x="3419791" y="0"/>
+                    <a:pt x="3414832" y="0"/>
                   </a:moveTo>
                   <a:lnTo>
-                    <a:pt x="3457907" y="267360"/>
-                  </a:lnTo>
-                  <a:lnTo>
-                    <a:pt x="3529529" y="701879"/>
-                  </a:lnTo>
-                  <a:lnTo>
-                    <a:pt x="3601152" y="1077696"/>
-                  </a:lnTo>
-                  <a:lnTo>
-                    <a:pt x="3672774" y="1402743"/>
-                  </a:lnTo>
-                  <a:lnTo>
-                    <a:pt x="3744397" y="1683877"/>
-                  </a:lnTo>
-                  <a:lnTo>
-                    <a:pt x="3816020" y="1927031"/>
-                  </a:lnTo>
-                  <a:lnTo>
-                    <a:pt x="3887642" y="2137336"/>
-                  </a:lnTo>
-                  <a:lnTo>
-                    <a:pt x="3959265" y="2319230"/>
-                  </a:lnTo>
-                  <a:lnTo>
-                    <a:pt x="4030887" y="2476551"/>
-                  </a:lnTo>
-                  <a:lnTo>
-                    <a:pt x="4102510" y="2612618"/>
-                  </a:lnTo>
-                  <a:lnTo>
-                    <a:pt x="4174132" y="2667853"/>
-                  </a:lnTo>
-                  <a:lnTo>
-                    <a:pt x="4245755" y="2687923"/>
-                  </a:lnTo>
-                  <a:lnTo>
-                    <a:pt x="4317377" y="2707499"/>
-                  </a:lnTo>
-                  <a:lnTo>
-                    <a:pt x="4389000" y="2726594"/>
-                  </a:lnTo>
-                  <a:lnTo>
-                    <a:pt x="4460622" y="2745218"/>
-                  </a:lnTo>
-                  <a:lnTo>
-                    <a:pt x="4532245" y="2763385"/>
-                  </a:lnTo>
-                  <a:lnTo>
-                    <a:pt x="4603867" y="2781105"/>
-                  </a:lnTo>
-                  <a:lnTo>
-                    <a:pt x="4675490" y="2798389"/>
-                  </a:lnTo>
-                  <a:lnTo>
-                    <a:pt x="4747112" y="2815248"/>
-                  </a:lnTo>
-                  <a:lnTo>
-                    <a:pt x="4818735" y="2831692"/>
-                  </a:lnTo>
-                  <a:lnTo>
-                    <a:pt x="4890357" y="2847731"/>
-                  </a:lnTo>
-                  <a:lnTo>
-                    <a:pt x="4961980" y="2863376"/>
-                  </a:lnTo>
-                  <a:lnTo>
-                    <a:pt x="5033602" y="2878636"/>
-                  </a:lnTo>
-                  <a:lnTo>
-                    <a:pt x="5105225" y="2893521"/>
-                  </a:lnTo>
-                  <a:lnTo>
-                    <a:pt x="5176848" y="2908040"/>
-                  </a:lnTo>
-                  <a:lnTo>
-                    <a:pt x="5248470" y="2922201"/>
-                  </a:lnTo>
-                  <a:lnTo>
-                    <a:pt x="5320093" y="2936015"/>
-                  </a:lnTo>
-                  <a:lnTo>
-                    <a:pt x="5391715" y="2949488"/>
-                  </a:lnTo>
-                  <a:lnTo>
-                    <a:pt x="5463338" y="2962630"/>
-                  </a:lnTo>
-                  <a:lnTo>
-                    <a:pt x="5534960" y="2975449"/>
-                  </a:lnTo>
-                  <a:lnTo>
-                    <a:pt x="5606583" y="2987952"/>
-                  </a:lnTo>
-                  <a:lnTo>
-                    <a:pt x="5678205" y="3000148"/>
-                  </a:lnTo>
-                  <a:lnTo>
-                    <a:pt x="5749828" y="3012044"/>
-                  </a:lnTo>
-                  <a:lnTo>
-                    <a:pt x="5821450" y="3023647"/>
-                  </a:lnTo>
-                  <a:lnTo>
-                    <a:pt x="5893073" y="3034965"/>
-                  </a:lnTo>
-                  <a:lnTo>
-                    <a:pt x="5964695" y="3046004"/>
-                  </a:lnTo>
-                  <a:lnTo>
-                    <a:pt x="6036318" y="3056772"/>
-                  </a:lnTo>
-                  <a:lnTo>
-                    <a:pt x="6107940" y="3067275"/>
-                  </a:lnTo>
-                  <a:lnTo>
-                    <a:pt x="6179563" y="3077519"/>
-                  </a:lnTo>
-                  <a:lnTo>
-                    <a:pt x="6251185" y="3087512"/>
-                  </a:lnTo>
-                  <a:lnTo>
-                    <a:pt x="6322808" y="3097259"/>
-                  </a:lnTo>
-                  <a:lnTo>
-                    <a:pt x="6394430" y="3106766"/>
-                  </a:lnTo>
-                  <a:lnTo>
-                    <a:pt x="6466053" y="3116039"/>
-                  </a:lnTo>
-                  <a:lnTo>
-                    <a:pt x="6537676" y="3125084"/>
-                  </a:lnTo>
-                  <a:lnTo>
-                    <a:pt x="6609298" y="3133906"/>
-                  </a:lnTo>
-                  <a:lnTo>
-                    <a:pt x="6680921" y="3142512"/>
-                  </a:lnTo>
-                  <a:lnTo>
-                    <a:pt x="6752543" y="3150906"/>
-                  </a:lnTo>
-                  <a:lnTo>
-                    <a:pt x="6752543" y="3479692"/>
-                  </a:lnTo>
-                  <a:lnTo>
-                    <a:pt x="6680921" y="3479059"/>
-                  </a:lnTo>
-                  <a:lnTo>
-                    <a:pt x="6609298" y="3478327"/>
-                  </a:lnTo>
-                  <a:lnTo>
-                    <a:pt x="6537676" y="3477480"/>
-                  </a:lnTo>
-                  <a:lnTo>
-                    <a:pt x="6466053" y="3476502"/>
-                  </a:lnTo>
-                  <a:lnTo>
-                    <a:pt x="6394430" y="3475370"/>
-                  </a:lnTo>
-                  <a:lnTo>
-                    <a:pt x="6322808" y="3474061"/>
-                  </a:lnTo>
-                  <a:lnTo>
-                    <a:pt x="6251185" y="3472549"/>
-                  </a:lnTo>
-                  <a:lnTo>
-                    <a:pt x="6179563" y="3470800"/>
-                  </a:lnTo>
-                  <a:lnTo>
-                    <a:pt x="6107940" y="3468777"/>
-                  </a:lnTo>
-                  <a:lnTo>
-                    <a:pt x="6036318" y="3466439"/>
-                  </a:lnTo>
-                  <a:lnTo>
-                    <a:pt x="5964695" y="3463736"/>
-                  </a:lnTo>
-                  <a:lnTo>
-                    <a:pt x="5893073" y="3460610"/>
-                  </a:lnTo>
-                  <a:lnTo>
-                    <a:pt x="5821450" y="3456997"/>
-                  </a:lnTo>
-                  <a:lnTo>
-                    <a:pt x="5749828" y="3452819"/>
-                  </a:lnTo>
-                  <a:lnTo>
-                    <a:pt x="5678205" y="3447988"/>
-                  </a:lnTo>
-                  <a:lnTo>
-                    <a:pt x="5606583" y="3442402"/>
-                  </a:lnTo>
-                  <a:lnTo>
-                    <a:pt x="5534960" y="3435944"/>
-                  </a:lnTo>
-                  <a:lnTo>
-                    <a:pt x="5463338" y="3428478"/>
-                  </a:lnTo>
-                  <a:lnTo>
-                    <a:pt x="5391715" y="3419845"/>
-                  </a:lnTo>
-                  <a:lnTo>
-                    <a:pt x="5320093" y="3409864"/>
-                  </a:lnTo>
-                  <a:lnTo>
-                    <a:pt x="5248470" y="3398324"/>
-                  </a:lnTo>
-                  <a:lnTo>
-                    <a:pt x="5176848" y="3384981"/>
-                  </a:lnTo>
-                  <a:lnTo>
-                    <a:pt x="5105225" y="3369554"/>
-                  </a:lnTo>
-                  <a:lnTo>
-                    <a:pt x="5033602" y="3351718"/>
-                  </a:lnTo>
-                  <a:lnTo>
-                    <a:pt x="4961980" y="3331095"/>
-                  </a:lnTo>
-                  <a:lnTo>
-                    <a:pt x="4890357" y="3307252"/>
-                  </a:lnTo>
-                  <a:lnTo>
-                    <a:pt x="4818735" y="3279684"/>
-                  </a:lnTo>
-                  <a:lnTo>
-                    <a:pt x="4747112" y="3247810"/>
-                  </a:lnTo>
-                  <a:lnTo>
-                    <a:pt x="4675490" y="3210957"/>
-                  </a:lnTo>
-                  <a:lnTo>
-                    <a:pt x="4603867" y="3168348"/>
-                  </a:lnTo>
-                  <a:lnTo>
-                    <a:pt x="4532245" y="3119084"/>
-                  </a:lnTo>
-                  <a:lnTo>
-                    <a:pt x="4460622" y="3062125"/>
-                  </a:lnTo>
-                  <a:lnTo>
-                    <a:pt x="4389000" y="2996269"/>
-                  </a:lnTo>
-                  <a:lnTo>
-                    <a:pt x="4317377" y="2920126"/>
-                  </a:lnTo>
-                  <a:lnTo>
-                    <a:pt x="4245755" y="2832090"/>
-                  </a:lnTo>
-                  <a:lnTo>
-                    <a:pt x="4174132" y="2730304"/>
-                  </a:lnTo>
-                  <a:lnTo>
-                    <a:pt x="4102510" y="2647277"/>
-                  </a:lnTo>
-                  <a:lnTo>
-                    <a:pt x="4030887" y="2626183"/>
-                  </a:lnTo>
-                  <a:lnTo>
-                    <a:pt x="3959265" y="2604556"/>
-                  </a:lnTo>
-                  <a:lnTo>
-                    <a:pt x="3887642" y="2582384"/>
-                  </a:lnTo>
-                  <a:lnTo>
-                    <a:pt x="3816020" y="2559652"/>
-                  </a:lnTo>
-                  <a:lnTo>
-                    <a:pt x="3744397" y="2536348"/>
-                  </a:lnTo>
-                  <a:lnTo>
-                    <a:pt x="3672774" y="2512455"/>
-                  </a:lnTo>
-                  <a:lnTo>
-                    <a:pt x="3601152" y="2487961"/>
-                  </a:lnTo>
-                  <a:lnTo>
-                    <a:pt x="3529529" y="2462848"/>
-                  </a:lnTo>
-                  <a:lnTo>
-                    <a:pt x="3457907" y="2437102"/>
-                  </a:lnTo>
-                  <a:lnTo>
-                    <a:pt x="3386284" y="2410707"/>
-                  </a:lnTo>
-                  <a:lnTo>
-                    <a:pt x="3314662" y="2383646"/>
-                  </a:lnTo>
-                  <a:lnTo>
-                    <a:pt x="3243039" y="2355903"/>
-                  </a:lnTo>
-                  <a:lnTo>
-                    <a:pt x="3171417" y="2327460"/>
-                  </a:lnTo>
-                  <a:lnTo>
-                    <a:pt x="3099794" y="2298300"/>
-                  </a:lnTo>
-                  <a:lnTo>
-                    <a:pt x="3028172" y="2268404"/>
-                  </a:lnTo>
-                  <a:lnTo>
-                    <a:pt x="2956549" y="2237755"/>
-                  </a:lnTo>
-                  <a:lnTo>
-                    <a:pt x="2884927" y="2206332"/>
-                  </a:lnTo>
-                  <a:lnTo>
-                    <a:pt x="2813304" y="2174117"/>
-                  </a:lnTo>
-                  <a:lnTo>
-                    <a:pt x="2741682" y="2141090"/>
-                  </a:lnTo>
-                  <a:lnTo>
-                    <a:pt x="2670059" y="2107230"/>
-                  </a:lnTo>
-                  <a:lnTo>
-                    <a:pt x="2598437" y="2072516"/>
-                  </a:lnTo>
-                  <a:lnTo>
-                    <a:pt x="2526814" y="2036926"/>
-                  </a:lnTo>
-                  <a:lnTo>
-                    <a:pt x="2455192" y="2000439"/>
-                  </a:lnTo>
-                  <a:lnTo>
-                    <a:pt x="2383569" y="1963031"/>
-                  </a:lnTo>
-                  <a:lnTo>
-                    <a:pt x="2311946" y="1924681"/>
-                  </a:lnTo>
-                  <a:lnTo>
-                    <a:pt x="2240324" y="1885363"/>
-                  </a:lnTo>
-                  <a:lnTo>
-                    <a:pt x="2168701" y="1845054"/>
-                  </a:lnTo>
-                  <a:lnTo>
-                    <a:pt x="2097079" y="1803728"/>
-                  </a:lnTo>
-                  <a:lnTo>
-                    <a:pt x="2025456" y="1761360"/>
-                  </a:lnTo>
-                  <a:lnTo>
-                    <a:pt x="1953834" y="1717923"/>
-                  </a:lnTo>
-                  <a:lnTo>
-                    <a:pt x="1882211" y="1673391"/>
-                  </a:lnTo>
-                  <a:lnTo>
-                    <a:pt x="1810589" y="1627736"/>
-                  </a:lnTo>
-                  <a:lnTo>
-                    <a:pt x="1738966" y="1580929"/>
-                  </a:lnTo>
-                  <a:lnTo>
-                    <a:pt x="1667344" y="1532943"/>
-                  </a:lnTo>
-                  <a:lnTo>
-                    <a:pt x="1595721" y="1483745"/>
-                  </a:lnTo>
-                  <a:lnTo>
-                    <a:pt x="1524099" y="1433308"/>
-                  </a:lnTo>
-                  <a:lnTo>
-                    <a:pt x="1452476" y="1381598"/>
-                  </a:lnTo>
-                  <a:lnTo>
-                    <a:pt x="1380854" y="1328584"/>
-                  </a:lnTo>
-                  <a:lnTo>
-                    <a:pt x="1309231" y="1274234"/>
-                  </a:lnTo>
-                  <a:lnTo>
-                    <a:pt x="1237609" y="1218512"/>
-                  </a:lnTo>
-                  <a:lnTo>
-                    <a:pt x="1165986" y="1161386"/>
-                  </a:lnTo>
-                  <a:lnTo>
-                    <a:pt x="1094364" y="1102818"/>
-                  </a:lnTo>
-                  <a:lnTo>
-                    <a:pt x="1022741" y="1042774"/>
-                  </a:lnTo>
-                  <a:lnTo>
-                    <a:pt x="951118" y="981216"/>
-                  </a:lnTo>
-                  <a:lnTo>
-                    <a:pt x="879496" y="918105"/>
-                  </a:lnTo>
-                  <a:lnTo>
-                    <a:pt x="807873" y="853402"/>
-                  </a:lnTo>
-                  <a:lnTo>
-                    <a:pt x="736251" y="787068"/>
-                  </a:lnTo>
-                  <a:lnTo>
-                    <a:pt x="664628" y="719061"/>
-                  </a:lnTo>
-                  <a:lnTo>
-                    <a:pt x="593006" y="649339"/>
-                  </a:lnTo>
-                  <a:lnTo>
-                    <a:pt x="521383" y="577858"/>
-                  </a:lnTo>
-                  <a:lnTo>
-                    <a:pt x="449761" y="504575"/>
-                  </a:lnTo>
-                  <a:lnTo>
-                    <a:pt x="378138" y="429444"/>
-                  </a:lnTo>
-                  <a:lnTo>
-                    <a:pt x="306516" y="352418"/>
-                  </a:lnTo>
-                  <a:lnTo>
-                    <a:pt x="234893" y="273449"/>
-                  </a:lnTo>
-                  <a:lnTo>
-                    <a:pt x="163271" y="192489"/>
-                  </a:lnTo>
-                  <a:lnTo>
-                    <a:pt x="91648" y="109488"/>
-                  </a:lnTo>
-                  <a:lnTo>
-                    <a:pt x="20026" y="24393"/>
+                    <a:pt x="3432675" y="130673"/>
+                  </a:lnTo>
+                  <a:lnTo>
+                    <a:pt x="3504298" y="584244"/>
+                  </a:lnTo>
+                  <a:lnTo>
+                    <a:pt x="3575920" y="976461"/>
+                  </a:lnTo>
+                  <a:lnTo>
+                    <a:pt x="3647543" y="1315623"/>
+                  </a:lnTo>
+                  <a:lnTo>
+                    <a:pt x="3719166" y="1608906"/>
+                  </a:lnTo>
+                  <a:lnTo>
+                    <a:pt x="3790788" y="1862516"/>
+                  </a:lnTo>
+                  <a:lnTo>
+                    <a:pt x="3862411" y="2081820"/>
+                  </a:lnTo>
+                  <a:lnTo>
+                    <a:pt x="3934033" y="2271460"/>
+                  </a:lnTo>
+                  <a:lnTo>
+                    <a:pt x="4005656" y="2435446"/>
+                  </a:lnTo>
+                  <a:lnTo>
+                    <a:pt x="4077278" y="2577250"/>
+                  </a:lnTo>
+                  <a:lnTo>
+                    <a:pt x="4148901" y="2662291"/>
+                  </a:lnTo>
+                  <a:lnTo>
+                    <a:pt x="4220523" y="2682525"/>
+                  </a:lnTo>
+                  <a:lnTo>
+                    <a:pt x="4292146" y="2702261"/>
+                  </a:lnTo>
+                  <a:lnTo>
+                    <a:pt x="4363768" y="2721511"/>
+                  </a:lnTo>
+                  <a:lnTo>
+                    <a:pt x="4435391" y="2740287"/>
+                  </a:lnTo>
+                  <a:lnTo>
+                    <a:pt x="4507013" y="2758600"/>
+                  </a:lnTo>
+                  <a:lnTo>
+                    <a:pt x="4578636" y="2776462"/>
+                  </a:lnTo>
+                  <a:lnTo>
+                    <a:pt x="4650258" y="2793885"/>
+                  </a:lnTo>
+                  <a:lnTo>
+                    <a:pt x="4721881" y="2810878"/>
+                  </a:lnTo>
+                  <a:lnTo>
+                    <a:pt x="4793503" y="2827452"/>
+                  </a:lnTo>
+                  <a:lnTo>
+                    <a:pt x="4865126" y="2843618"/>
+                  </a:lnTo>
+                  <a:lnTo>
+                    <a:pt x="4936748" y="2859386"/>
+                  </a:lnTo>
+                  <a:lnTo>
+                    <a:pt x="5008371" y="2874766"/>
+                  </a:lnTo>
+                  <a:lnTo>
+                    <a:pt x="5079994" y="2889767"/>
+                  </a:lnTo>
+                  <a:lnTo>
+                    <a:pt x="5151616" y="2904398"/>
+                  </a:lnTo>
+                  <a:lnTo>
+                    <a:pt x="5223239" y="2918669"/>
+                  </a:lnTo>
+                  <a:lnTo>
+                    <a:pt x="5294861" y="2932588"/>
+                  </a:lnTo>
+                  <a:lnTo>
+                    <a:pt x="5366484" y="2946164"/>
+                  </a:lnTo>
+                  <a:lnTo>
+                    <a:pt x="5438106" y="2959406"/>
+                  </a:lnTo>
+                  <a:lnTo>
+                    <a:pt x="5509729" y="2972322"/>
+                  </a:lnTo>
+                  <a:lnTo>
+                    <a:pt x="5581351" y="2984920"/>
+                  </a:lnTo>
+                  <a:lnTo>
+                    <a:pt x="5652974" y="2997207"/>
+                  </a:lnTo>
+                  <a:lnTo>
+                    <a:pt x="5724596" y="3009192"/>
+                  </a:lnTo>
+                  <a:lnTo>
+                    <a:pt x="5796219" y="3020881"/>
+                  </a:lnTo>
+                  <a:lnTo>
+                    <a:pt x="5867841" y="3032283"/>
+                  </a:lnTo>
+                  <a:lnTo>
+                    <a:pt x="5939464" y="3043404"/>
+                  </a:lnTo>
+                  <a:lnTo>
+                    <a:pt x="6011086" y="3054250"/>
+                  </a:lnTo>
+                  <a:lnTo>
+                    <a:pt x="6082709" y="3064830"/>
+                  </a:lnTo>
+                  <a:lnTo>
+                    <a:pt x="6154331" y="3075149"/>
+                  </a:lnTo>
+                  <a:lnTo>
+                    <a:pt x="6225954" y="3085214"/>
+                  </a:lnTo>
+                  <a:lnTo>
+                    <a:pt x="6297576" y="3095031"/>
+                  </a:lnTo>
+                  <a:lnTo>
+                    <a:pt x="6369199" y="3104606"/>
+                  </a:lnTo>
+                  <a:lnTo>
+                    <a:pt x="6440822" y="3113945"/>
+                  </a:lnTo>
+                  <a:lnTo>
+                    <a:pt x="6512444" y="3123054"/>
+                  </a:lnTo>
+                  <a:lnTo>
+                    <a:pt x="6584067" y="3131939"/>
+                  </a:lnTo>
+                  <a:lnTo>
+                    <a:pt x="6655689" y="3140605"/>
+                  </a:lnTo>
+                  <a:lnTo>
+                    <a:pt x="6727312" y="3149057"/>
+                  </a:lnTo>
+                  <a:lnTo>
+                    <a:pt x="6727312" y="3479559"/>
+                  </a:lnTo>
+                  <a:lnTo>
+                    <a:pt x="6655689" y="3478904"/>
+                  </a:lnTo>
+                  <a:lnTo>
+                    <a:pt x="6584067" y="3478147"/>
+                  </a:lnTo>
+                  <a:lnTo>
+                    <a:pt x="6512444" y="3477271"/>
+                  </a:lnTo>
+                  <a:lnTo>
+                    <a:pt x="6440822" y="3476258"/>
+                  </a:lnTo>
+                  <a:lnTo>
+                    <a:pt x="6369199" y="3475086"/>
+                  </a:lnTo>
+                  <a:lnTo>
+                    <a:pt x="6297576" y="3473731"/>
+                  </a:lnTo>
+                  <a:lnTo>
+                    <a:pt x="6225954" y="3472165"/>
+                  </a:lnTo>
+                  <a:lnTo>
+                    <a:pt x="6154331" y="3470353"/>
+                  </a:lnTo>
+                  <a:lnTo>
+                    <a:pt x="6082709" y="3468258"/>
+                  </a:lnTo>
+                  <a:lnTo>
+                    <a:pt x="6011086" y="3465835"/>
+                  </a:lnTo>
+                  <a:lnTo>
+                    <a:pt x="5939464" y="3463033"/>
+                  </a:lnTo>
+                  <a:lnTo>
+                    <a:pt x="5867841" y="3459793"/>
+                  </a:lnTo>
+                  <a:lnTo>
+                    <a:pt x="5796219" y="3456045"/>
+                  </a:lnTo>
+                  <a:lnTo>
+                    <a:pt x="5724596" y="3451712"/>
+                  </a:lnTo>
+                  <a:lnTo>
+                    <a:pt x="5652974" y="3446701"/>
+                  </a:lnTo>
+                  <a:lnTo>
+                    <a:pt x="5581351" y="3440906"/>
+                  </a:lnTo>
+                  <a:lnTo>
+                    <a:pt x="5509729" y="3434204"/>
+                  </a:lnTo>
+                  <a:lnTo>
+                    <a:pt x="5438106" y="3426455"/>
+                  </a:lnTo>
+                  <a:lnTo>
+                    <a:pt x="5366484" y="3417492"/>
+                  </a:lnTo>
+                  <a:lnTo>
+                    <a:pt x="5294861" y="3407128"/>
+                  </a:lnTo>
+                  <a:lnTo>
+                    <a:pt x="5223239" y="3395143"/>
+                  </a:lnTo>
+                  <a:lnTo>
+                    <a:pt x="5151616" y="3381282"/>
+                  </a:lnTo>
+                  <a:lnTo>
+                    <a:pt x="5079994" y="3365254"/>
+                  </a:lnTo>
+                  <a:lnTo>
+                    <a:pt x="5008371" y="3346718"/>
+                  </a:lnTo>
+                  <a:lnTo>
+                    <a:pt x="4936748" y="3325283"/>
+                  </a:lnTo>
+                  <a:lnTo>
+                    <a:pt x="4865126" y="3300494"/>
+                  </a:lnTo>
+                  <a:lnTo>
+                    <a:pt x="4793503" y="3271828"/>
+                  </a:lnTo>
+                  <a:lnTo>
+                    <a:pt x="4721881" y="3238677"/>
+                  </a:lnTo>
+                  <a:lnTo>
+                    <a:pt x="4650258" y="3200341"/>
+                  </a:lnTo>
+                  <a:lnTo>
+                    <a:pt x="4578636" y="3156007"/>
+                  </a:lnTo>
+                  <a:lnTo>
+                    <a:pt x="4507013" y="3104739"/>
+                  </a:lnTo>
+                  <a:lnTo>
+                    <a:pt x="4435391" y="3045450"/>
+                  </a:lnTo>
+                  <a:lnTo>
+                    <a:pt x="4363768" y="2976887"/>
+                  </a:lnTo>
+                  <a:lnTo>
+                    <a:pt x="4292146" y="2897599"/>
+                  </a:lnTo>
+                  <a:lnTo>
+                    <a:pt x="4220523" y="2805907"/>
+                  </a:lnTo>
+                  <a:lnTo>
+                    <a:pt x="4148901" y="2699872"/>
+                  </a:lnTo>
+                  <a:lnTo>
+                    <a:pt x="4077278" y="2641545"/>
+                  </a:lnTo>
+                  <a:lnTo>
+                    <a:pt x="4005656" y="2620276"/>
+                  </a:lnTo>
+                  <a:lnTo>
+                    <a:pt x="3934033" y="2598469"/>
+                  </a:lnTo>
+                  <a:lnTo>
+                    <a:pt x="3862411" y="2576112"/>
+                  </a:lnTo>
+                  <a:lnTo>
+                    <a:pt x="3790788" y="2553190"/>
+                  </a:lnTo>
+                  <a:lnTo>
+                    <a:pt x="3719166" y="2529689"/>
+                  </a:lnTo>
+                  <a:lnTo>
+                    <a:pt x="3647543" y="2505594"/>
+                  </a:lnTo>
+                  <a:lnTo>
+                    <a:pt x="3575920" y="2480892"/>
+                  </a:lnTo>
+                  <a:lnTo>
+                    <a:pt x="3504298" y="2455565"/>
+                  </a:lnTo>
+                  <a:lnTo>
+                    <a:pt x="3432675" y="2429598"/>
+                  </a:lnTo>
+                  <a:lnTo>
+                    <a:pt x="3361053" y="2402976"/>
+                  </a:lnTo>
+                  <a:lnTo>
+                    <a:pt x="3289430" y="2375682"/>
+                  </a:lnTo>
+                  <a:lnTo>
+                    <a:pt x="3217808" y="2347698"/>
+                  </a:lnTo>
+                  <a:lnTo>
+                    <a:pt x="3146185" y="2319008"/>
+                  </a:lnTo>
+                  <a:lnTo>
+                    <a:pt x="3074563" y="2289593"/>
+                  </a:lnTo>
+                  <a:lnTo>
+                    <a:pt x="3002940" y="2259435"/>
+                  </a:lnTo>
+                  <a:lnTo>
+                    <a:pt x="2931318" y="2228515"/>
+                  </a:lnTo>
+                  <a:lnTo>
+                    <a:pt x="2859695" y="2196815"/>
+                  </a:lnTo>
+                  <a:lnTo>
+                    <a:pt x="2788073" y="2164314"/>
+                  </a:lnTo>
+                  <a:lnTo>
+                    <a:pt x="2716450" y="2130992"/>
+                  </a:lnTo>
+                  <a:lnTo>
+                    <a:pt x="2644828" y="2096829"/>
+                  </a:lnTo>
+                  <a:lnTo>
+                    <a:pt x="2573205" y="2061803"/>
+                  </a:lnTo>
+                  <a:lnTo>
+                    <a:pt x="2501583" y="2025892"/>
+                  </a:lnTo>
+                  <a:lnTo>
+                    <a:pt x="2429960" y="1989075"/>
+                  </a:lnTo>
+                  <a:lnTo>
+                    <a:pt x="2358338" y="1951327"/>
+                  </a:lnTo>
+                  <a:lnTo>
+                    <a:pt x="2286715" y="1912627"/>
+                  </a:lnTo>
+                  <a:lnTo>
+                    <a:pt x="2215092" y="1872949"/>
+                  </a:lnTo>
+                  <a:lnTo>
+                    <a:pt x="2143470" y="1832269"/>
+                  </a:lnTo>
+                  <a:lnTo>
+                    <a:pt x="2071847" y="1790561"/>
+                  </a:lnTo>
+                  <a:lnTo>
+                    <a:pt x="2000225" y="1747800"/>
+                  </a:lnTo>
+                  <a:lnTo>
+                    <a:pt x="1928602" y="1703960"/>
+                  </a:lnTo>
+                  <a:lnTo>
+                    <a:pt x="1856980" y="1659012"/>
+                  </a:lnTo>
+                  <a:lnTo>
+                    <a:pt x="1785357" y="1612929"/>
+                  </a:lnTo>
+                  <a:lnTo>
+                    <a:pt x="1713735" y="1565682"/>
+                  </a:lnTo>
+                  <a:lnTo>
+                    <a:pt x="1642112" y="1517242"/>
+                  </a:lnTo>
+                  <a:lnTo>
+                    <a:pt x="1570490" y="1467579"/>
+                  </a:lnTo>
+                  <a:lnTo>
+                    <a:pt x="1498867" y="1416661"/>
+                  </a:lnTo>
+                  <a:lnTo>
+                    <a:pt x="1427245" y="1364458"/>
+                  </a:lnTo>
+                  <a:lnTo>
+                    <a:pt x="1355622" y="1310936"/>
+                  </a:lnTo>
+                  <a:lnTo>
+                    <a:pt x="1284000" y="1256062"/>
+                  </a:lnTo>
+                  <a:lnTo>
+                    <a:pt x="1212377" y="1199803"/>
+                  </a:lnTo>
+                  <a:lnTo>
+                    <a:pt x="1140755" y="1142123"/>
+                  </a:lnTo>
+                  <a:lnTo>
+                    <a:pt x="1069132" y="1082986"/>
+                  </a:lnTo>
+                  <a:lnTo>
+                    <a:pt x="997510" y="1022356"/>
+                  </a:lnTo>
+                  <a:lnTo>
+                    <a:pt x="925887" y="960195"/>
+                  </a:lnTo>
+                  <a:lnTo>
+                    <a:pt x="854264" y="896463"/>
+                  </a:lnTo>
+                  <a:lnTo>
+                    <a:pt x="782642" y="831122"/>
+                  </a:lnTo>
+                  <a:lnTo>
+                    <a:pt x="711019" y="764131"/>
+                  </a:lnTo>
+                  <a:lnTo>
+                    <a:pt x="639397" y="695449"/>
+                  </a:lnTo>
+                  <a:lnTo>
+                    <a:pt x="567774" y="625031"/>
+                  </a:lnTo>
+                  <a:lnTo>
+                    <a:pt x="496152" y="552835"/>
+                  </a:lnTo>
+                  <a:lnTo>
+                    <a:pt x="424529" y="478816"/>
+                  </a:lnTo>
+                  <a:lnTo>
+                    <a:pt x="352907" y="402928"/>
+                  </a:lnTo>
+                  <a:lnTo>
+                    <a:pt x="281284" y="325123"/>
+                  </a:lnTo>
+                  <a:lnTo>
+                    <a:pt x="209662" y="245353"/>
+                  </a:lnTo>
+                  <a:lnTo>
+                    <a:pt x="138039" y="163569"/>
+                  </a:lnTo>
+                  <a:lnTo>
+                    <a:pt x="66417" y="79719"/>
                   </a:lnTo>
                   <a:lnTo>
                     <a:pt x="0" y="0"/>
@@ -3379,156 +3376,156 @@
           </p:nvSpPr>
           <p:spPr>
             <a:xfrm>
-              <a:off x="4929927" y="2073503"/>
-              <a:ext cx="3332752" cy="3150906"/>
+              <a:off x="4950200" y="2073503"/>
+              <a:ext cx="3312479" cy="3149057"/>
             </a:xfrm>
             <a:custGeom>
               <a:avLst/>
               <a:pathLst>
-                <a:path w="3332752" h="3150906">
+                <a:path w="3312479" h="3149057">
                   <a:moveTo>
                     <a:pt x="0" y="0"/>
                   </a:moveTo>
                   <a:lnTo>
-                    <a:pt x="38115" y="267360"/>
-                  </a:lnTo>
-                  <a:lnTo>
-                    <a:pt x="109738" y="701879"/>
-                  </a:lnTo>
-                  <a:lnTo>
-                    <a:pt x="181360" y="1077696"/>
-                  </a:lnTo>
-                  <a:lnTo>
-                    <a:pt x="252983" y="1402743"/>
-                  </a:lnTo>
-                  <a:lnTo>
-                    <a:pt x="324605" y="1683877"/>
-                  </a:lnTo>
-                  <a:lnTo>
-                    <a:pt x="396228" y="1927031"/>
-                  </a:lnTo>
-                  <a:lnTo>
-                    <a:pt x="467851" y="2137336"/>
-                  </a:lnTo>
-                  <a:lnTo>
-                    <a:pt x="539473" y="2319230"/>
-                  </a:lnTo>
-                  <a:lnTo>
-                    <a:pt x="611096" y="2476551"/>
-                  </a:lnTo>
-                  <a:lnTo>
-                    <a:pt x="682718" y="2612618"/>
-                  </a:lnTo>
-                  <a:lnTo>
-                    <a:pt x="754341" y="2667853"/>
-                  </a:lnTo>
-                  <a:lnTo>
-                    <a:pt x="825963" y="2687923"/>
-                  </a:lnTo>
-                  <a:lnTo>
-                    <a:pt x="897586" y="2707499"/>
-                  </a:lnTo>
-                  <a:lnTo>
-                    <a:pt x="969208" y="2726594"/>
-                  </a:lnTo>
-                  <a:lnTo>
-                    <a:pt x="1040831" y="2745218"/>
-                  </a:lnTo>
-                  <a:lnTo>
-                    <a:pt x="1112453" y="2763385"/>
-                  </a:lnTo>
-                  <a:lnTo>
-                    <a:pt x="1184076" y="2781105"/>
-                  </a:lnTo>
-                  <a:lnTo>
-                    <a:pt x="1255698" y="2798389"/>
-                  </a:lnTo>
-                  <a:lnTo>
-                    <a:pt x="1327321" y="2815248"/>
-                  </a:lnTo>
-                  <a:lnTo>
-                    <a:pt x="1398943" y="2831692"/>
-                  </a:lnTo>
-                  <a:lnTo>
-                    <a:pt x="1470566" y="2847731"/>
-                  </a:lnTo>
-                  <a:lnTo>
-                    <a:pt x="1542188" y="2863376"/>
-                  </a:lnTo>
-                  <a:lnTo>
-                    <a:pt x="1613811" y="2878636"/>
-                  </a:lnTo>
-                  <a:lnTo>
-                    <a:pt x="1685433" y="2893521"/>
-                  </a:lnTo>
-                  <a:lnTo>
-                    <a:pt x="1757056" y="2908040"/>
-                  </a:lnTo>
-                  <a:lnTo>
-                    <a:pt x="1828679" y="2922201"/>
-                  </a:lnTo>
-                  <a:lnTo>
-                    <a:pt x="1900301" y="2936015"/>
-                  </a:lnTo>
-                  <a:lnTo>
-                    <a:pt x="1971924" y="2949488"/>
-                  </a:lnTo>
-                  <a:lnTo>
-                    <a:pt x="2043546" y="2962630"/>
-                  </a:lnTo>
-                  <a:lnTo>
-                    <a:pt x="2115169" y="2975449"/>
-                  </a:lnTo>
-                  <a:lnTo>
-                    <a:pt x="2186791" y="2987952"/>
-                  </a:lnTo>
-                  <a:lnTo>
-                    <a:pt x="2258414" y="3000148"/>
-                  </a:lnTo>
-                  <a:lnTo>
-                    <a:pt x="2330036" y="3012044"/>
-                  </a:lnTo>
-                  <a:lnTo>
-                    <a:pt x="2401659" y="3023647"/>
-                  </a:lnTo>
-                  <a:lnTo>
-                    <a:pt x="2473281" y="3034965"/>
-                  </a:lnTo>
-                  <a:lnTo>
-                    <a:pt x="2544904" y="3046004"/>
-                  </a:lnTo>
-                  <a:lnTo>
-                    <a:pt x="2616526" y="3056772"/>
-                  </a:lnTo>
-                  <a:lnTo>
-                    <a:pt x="2688149" y="3067275"/>
-                  </a:lnTo>
-                  <a:lnTo>
-                    <a:pt x="2759771" y="3077519"/>
-                  </a:lnTo>
-                  <a:lnTo>
-                    <a:pt x="2831394" y="3087512"/>
-                  </a:lnTo>
-                  <a:lnTo>
-                    <a:pt x="2903016" y="3097259"/>
-                  </a:lnTo>
-                  <a:lnTo>
-                    <a:pt x="2974639" y="3106766"/>
-                  </a:lnTo>
-                  <a:lnTo>
-                    <a:pt x="3046261" y="3116039"/>
-                  </a:lnTo>
-                  <a:lnTo>
-                    <a:pt x="3117884" y="3125084"/>
-                  </a:lnTo>
-                  <a:lnTo>
-                    <a:pt x="3189507" y="3133906"/>
-                  </a:lnTo>
-                  <a:lnTo>
-                    <a:pt x="3261129" y="3142512"/>
-                  </a:lnTo>
-                  <a:lnTo>
-                    <a:pt x="3332752" y="3150906"/>
+                    <a:pt x="17843" y="130673"/>
+                  </a:lnTo>
+                  <a:lnTo>
+                    <a:pt x="89465" y="584244"/>
+                  </a:lnTo>
+                  <a:lnTo>
+                    <a:pt x="161088" y="976461"/>
+                  </a:lnTo>
+                  <a:lnTo>
+                    <a:pt x="232710" y="1315623"/>
+                  </a:lnTo>
+                  <a:lnTo>
+                    <a:pt x="304333" y="1608906"/>
+                  </a:lnTo>
+                  <a:lnTo>
+                    <a:pt x="375955" y="1862516"/>
+                  </a:lnTo>
+                  <a:lnTo>
+                    <a:pt x="447578" y="2081820"/>
+                  </a:lnTo>
+                  <a:lnTo>
+                    <a:pt x="519200" y="2271460"/>
+                  </a:lnTo>
+                  <a:lnTo>
+                    <a:pt x="590823" y="2435446"/>
+                  </a:lnTo>
+                  <a:lnTo>
+                    <a:pt x="662445" y="2577250"/>
+                  </a:lnTo>
+                  <a:lnTo>
+                    <a:pt x="734068" y="2662291"/>
+                  </a:lnTo>
+                  <a:lnTo>
+                    <a:pt x="805690" y="2682525"/>
+                  </a:lnTo>
+                  <a:lnTo>
+                    <a:pt x="877313" y="2702261"/>
+                  </a:lnTo>
+                  <a:lnTo>
+                    <a:pt x="948935" y="2721511"/>
+                  </a:lnTo>
+                  <a:lnTo>
+                    <a:pt x="1020558" y="2740287"/>
+                  </a:lnTo>
+                  <a:lnTo>
+                    <a:pt x="1092181" y="2758600"/>
+                  </a:lnTo>
+                  <a:lnTo>
+                    <a:pt x="1163803" y="2776462"/>
+                  </a:lnTo>
+                  <a:lnTo>
+                    <a:pt x="1235426" y="2793885"/>
+                  </a:lnTo>
+                  <a:lnTo>
+                    <a:pt x="1307048" y="2810878"/>
+                  </a:lnTo>
+                  <a:lnTo>
+                    <a:pt x="1378671" y="2827452"/>
+                  </a:lnTo>
+                  <a:lnTo>
+                    <a:pt x="1450293" y="2843618"/>
+                  </a:lnTo>
+                  <a:lnTo>
+                    <a:pt x="1521916" y="2859386"/>
+                  </a:lnTo>
+                  <a:lnTo>
+                    <a:pt x="1593538" y="2874766"/>
+                  </a:lnTo>
+                  <a:lnTo>
+                    <a:pt x="1665161" y="2889767"/>
+                  </a:lnTo>
+                  <a:lnTo>
+                    <a:pt x="1736783" y="2904398"/>
+                  </a:lnTo>
+                  <a:lnTo>
+                    <a:pt x="1808406" y="2918669"/>
+                  </a:lnTo>
+                  <a:lnTo>
+                    <a:pt x="1880028" y="2932588"/>
+                  </a:lnTo>
+                  <a:lnTo>
+                    <a:pt x="1951651" y="2946164"/>
+                  </a:lnTo>
+                  <a:lnTo>
+                    <a:pt x="2023273" y="2959406"/>
+                  </a:lnTo>
+                  <a:lnTo>
+                    <a:pt x="2094896" y="2972322"/>
+                  </a:lnTo>
+                  <a:lnTo>
+                    <a:pt x="2166518" y="2984920"/>
+                  </a:lnTo>
+                  <a:lnTo>
+                    <a:pt x="2238141" y="2997207"/>
+                  </a:lnTo>
+                  <a:lnTo>
+                    <a:pt x="2309763" y="3009192"/>
+                  </a:lnTo>
+                  <a:lnTo>
+                    <a:pt x="2381386" y="3020881"/>
+                  </a:lnTo>
+                  <a:lnTo>
+                    <a:pt x="2453009" y="3032283"/>
+                  </a:lnTo>
+                  <a:lnTo>
+                    <a:pt x="2524631" y="3043404"/>
+                  </a:lnTo>
+                  <a:lnTo>
+                    <a:pt x="2596254" y="3054250"/>
+                  </a:lnTo>
+                  <a:lnTo>
+                    <a:pt x="2667876" y="3064830"/>
+                  </a:lnTo>
+                  <a:lnTo>
+                    <a:pt x="2739499" y="3075149"/>
+                  </a:lnTo>
+                  <a:lnTo>
+                    <a:pt x="2811121" y="3085214"/>
+                  </a:lnTo>
+                  <a:lnTo>
+                    <a:pt x="2882744" y="3095031"/>
+                  </a:lnTo>
+                  <a:lnTo>
+                    <a:pt x="2954366" y="3104606"/>
+                  </a:lnTo>
+                  <a:lnTo>
+                    <a:pt x="3025989" y="3113945"/>
+                  </a:lnTo>
+                  <a:lnTo>
+                    <a:pt x="3097611" y="3123054"/>
+                  </a:lnTo>
+                  <a:lnTo>
+                    <a:pt x="3169234" y="3131939"/>
+                  </a:lnTo>
+                  <a:lnTo>
+                    <a:pt x="3240856" y="3140605"/>
+                  </a:lnTo>
+                  <a:lnTo>
+                    <a:pt x="3312479" y="3149057"/>
                   </a:lnTo>
                 </a:path>
               </a:pathLst>
@@ -3548,297 +3545,294 @@
           </p:nvSpPr>
           <p:spPr>
             <a:xfrm>
-              <a:off x="1510135" y="2073503"/>
-              <a:ext cx="6752543" cy="3479692"/>
+              <a:off x="1535367" y="2073503"/>
+              <a:ext cx="6727312" cy="3479559"/>
             </a:xfrm>
             <a:custGeom>
               <a:avLst/>
               <a:pathLst>
-                <a:path w="6752543" h="3479692">
+                <a:path w="6727312" h="3479559">
                   <a:moveTo>
-                    <a:pt x="6752543" y="3479692"/>
+                    <a:pt x="6727312" y="3479559"/>
                   </a:moveTo>
                   <a:lnTo>
-                    <a:pt x="6680921" y="3479059"/>
-                  </a:lnTo>
-                  <a:lnTo>
-                    <a:pt x="6609298" y="3478327"/>
-                  </a:lnTo>
-                  <a:lnTo>
-                    <a:pt x="6537676" y="3477480"/>
-                  </a:lnTo>
-                  <a:lnTo>
-                    <a:pt x="6466053" y="3476502"/>
-                  </a:lnTo>
-                  <a:lnTo>
-                    <a:pt x="6394430" y="3475370"/>
-                  </a:lnTo>
-                  <a:lnTo>
-                    <a:pt x="6322808" y="3474061"/>
-                  </a:lnTo>
-                  <a:lnTo>
-                    <a:pt x="6251185" y="3472549"/>
-                  </a:lnTo>
-                  <a:lnTo>
-                    <a:pt x="6179563" y="3470800"/>
-                  </a:lnTo>
-                  <a:lnTo>
-                    <a:pt x="6107940" y="3468777"/>
-                  </a:lnTo>
-                  <a:lnTo>
-                    <a:pt x="6036318" y="3466439"/>
-                  </a:lnTo>
-                  <a:lnTo>
-                    <a:pt x="5964695" y="3463736"/>
-                  </a:lnTo>
-                  <a:lnTo>
-                    <a:pt x="5893073" y="3460610"/>
-                  </a:lnTo>
-                  <a:lnTo>
-                    <a:pt x="5821450" y="3456997"/>
-                  </a:lnTo>
-                  <a:lnTo>
-                    <a:pt x="5749828" y="3452819"/>
-                  </a:lnTo>
-                  <a:lnTo>
-                    <a:pt x="5678205" y="3447988"/>
-                  </a:lnTo>
-                  <a:lnTo>
-                    <a:pt x="5606583" y="3442402"/>
-                  </a:lnTo>
-                  <a:lnTo>
-                    <a:pt x="5534960" y="3435944"/>
-                  </a:lnTo>
-                  <a:lnTo>
-                    <a:pt x="5463338" y="3428478"/>
-                  </a:lnTo>
-                  <a:lnTo>
-                    <a:pt x="5391715" y="3419845"/>
-                  </a:lnTo>
-                  <a:lnTo>
-                    <a:pt x="5320093" y="3409864"/>
-                  </a:lnTo>
-                  <a:lnTo>
-                    <a:pt x="5248470" y="3398324"/>
-                  </a:lnTo>
-                  <a:lnTo>
-                    <a:pt x="5176848" y="3384981"/>
-                  </a:lnTo>
-                  <a:lnTo>
-                    <a:pt x="5105225" y="3369554"/>
-                  </a:lnTo>
-                  <a:lnTo>
-                    <a:pt x="5033602" y="3351718"/>
-                  </a:lnTo>
-                  <a:lnTo>
-                    <a:pt x="4961980" y="3331095"/>
-                  </a:lnTo>
-                  <a:lnTo>
-                    <a:pt x="4890357" y="3307252"/>
-                  </a:lnTo>
-                  <a:lnTo>
-                    <a:pt x="4818735" y="3279684"/>
-                  </a:lnTo>
-                  <a:lnTo>
-                    <a:pt x="4747112" y="3247810"/>
-                  </a:lnTo>
-                  <a:lnTo>
-                    <a:pt x="4675490" y="3210957"/>
-                  </a:lnTo>
-                  <a:lnTo>
-                    <a:pt x="4603867" y="3168348"/>
-                  </a:lnTo>
-                  <a:lnTo>
-                    <a:pt x="4532245" y="3119084"/>
-                  </a:lnTo>
-                  <a:lnTo>
-                    <a:pt x="4460622" y="3062125"/>
-                  </a:lnTo>
-                  <a:lnTo>
-                    <a:pt x="4389000" y="2996269"/>
-                  </a:lnTo>
-                  <a:lnTo>
-                    <a:pt x="4317377" y="2920126"/>
-                  </a:lnTo>
-                  <a:lnTo>
-                    <a:pt x="4245755" y="2832090"/>
-                  </a:lnTo>
-                  <a:lnTo>
-                    <a:pt x="4174132" y="2730304"/>
-                  </a:lnTo>
-                  <a:lnTo>
-                    <a:pt x="4102510" y="2647277"/>
-                  </a:lnTo>
-                  <a:lnTo>
-                    <a:pt x="4030887" y="2626183"/>
-                  </a:lnTo>
-                  <a:lnTo>
-                    <a:pt x="3959265" y="2604556"/>
-                  </a:lnTo>
-                  <a:lnTo>
-                    <a:pt x="3887642" y="2582384"/>
-                  </a:lnTo>
-                  <a:lnTo>
-                    <a:pt x="3816020" y="2559652"/>
-                  </a:lnTo>
-                  <a:lnTo>
-                    <a:pt x="3744397" y="2536348"/>
-                  </a:lnTo>
-                  <a:lnTo>
-                    <a:pt x="3672774" y="2512455"/>
-                  </a:lnTo>
-                  <a:lnTo>
-                    <a:pt x="3601152" y="2487961"/>
-                  </a:lnTo>
-                  <a:lnTo>
-                    <a:pt x="3529529" y="2462848"/>
-                  </a:lnTo>
-                  <a:lnTo>
-                    <a:pt x="3457907" y="2437102"/>
-                  </a:lnTo>
-                  <a:lnTo>
-                    <a:pt x="3386284" y="2410707"/>
-                  </a:lnTo>
-                  <a:lnTo>
-                    <a:pt x="3314662" y="2383646"/>
-                  </a:lnTo>
-                  <a:lnTo>
-                    <a:pt x="3243039" y="2355903"/>
-                  </a:lnTo>
-                  <a:lnTo>
-                    <a:pt x="3171417" y="2327460"/>
-                  </a:lnTo>
-                  <a:lnTo>
-                    <a:pt x="3099794" y="2298300"/>
-                  </a:lnTo>
-                  <a:lnTo>
-                    <a:pt x="3028172" y="2268404"/>
-                  </a:lnTo>
-                  <a:lnTo>
-                    <a:pt x="2956549" y="2237755"/>
-                  </a:lnTo>
-                  <a:lnTo>
-                    <a:pt x="2884927" y="2206332"/>
-                  </a:lnTo>
-                  <a:lnTo>
-                    <a:pt x="2813304" y="2174117"/>
-                  </a:lnTo>
-                  <a:lnTo>
-                    <a:pt x="2741682" y="2141090"/>
-                  </a:lnTo>
-                  <a:lnTo>
-                    <a:pt x="2670059" y="2107230"/>
-                  </a:lnTo>
-                  <a:lnTo>
-                    <a:pt x="2598437" y="2072516"/>
-                  </a:lnTo>
-                  <a:lnTo>
-                    <a:pt x="2526814" y="2036926"/>
-                  </a:lnTo>
-                  <a:lnTo>
-                    <a:pt x="2455192" y="2000439"/>
-                  </a:lnTo>
-                  <a:lnTo>
-                    <a:pt x="2383569" y="1963031"/>
-                  </a:lnTo>
-                  <a:lnTo>
-                    <a:pt x="2311946" y="1924681"/>
-                  </a:lnTo>
-                  <a:lnTo>
-                    <a:pt x="2240324" y="1885363"/>
-                  </a:lnTo>
-                  <a:lnTo>
-                    <a:pt x="2168701" y="1845054"/>
-                  </a:lnTo>
-                  <a:lnTo>
-                    <a:pt x="2097079" y="1803728"/>
-                  </a:lnTo>
-                  <a:lnTo>
-                    <a:pt x="2025456" y="1761360"/>
-                  </a:lnTo>
-                  <a:lnTo>
-                    <a:pt x="1953834" y="1717923"/>
-                  </a:lnTo>
-                  <a:lnTo>
-                    <a:pt x="1882211" y="1673391"/>
-                  </a:lnTo>
-                  <a:lnTo>
-                    <a:pt x="1810589" y="1627736"/>
-                  </a:lnTo>
-                  <a:lnTo>
-                    <a:pt x="1738966" y="1580929"/>
-                  </a:lnTo>
-                  <a:lnTo>
-                    <a:pt x="1667344" y="1532943"/>
-                  </a:lnTo>
-                  <a:lnTo>
-                    <a:pt x="1595721" y="1483745"/>
-                  </a:lnTo>
-                  <a:lnTo>
-                    <a:pt x="1524099" y="1433308"/>
-                  </a:lnTo>
-                  <a:lnTo>
-                    <a:pt x="1452476" y="1381598"/>
-                  </a:lnTo>
-                  <a:lnTo>
-                    <a:pt x="1380854" y="1328584"/>
-                  </a:lnTo>
-                  <a:lnTo>
-                    <a:pt x="1309231" y="1274234"/>
-                  </a:lnTo>
-                  <a:lnTo>
-                    <a:pt x="1237609" y="1218512"/>
-                  </a:lnTo>
-                  <a:lnTo>
-                    <a:pt x="1165986" y="1161386"/>
-                  </a:lnTo>
-                  <a:lnTo>
-                    <a:pt x="1094364" y="1102818"/>
-                  </a:lnTo>
-                  <a:lnTo>
-                    <a:pt x="1022741" y="1042774"/>
-                  </a:lnTo>
-                  <a:lnTo>
-                    <a:pt x="951118" y="981216"/>
-                  </a:lnTo>
-                  <a:lnTo>
-                    <a:pt x="879496" y="918105"/>
-                  </a:lnTo>
-                  <a:lnTo>
-                    <a:pt x="807873" y="853402"/>
-                  </a:lnTo>
-                  <a:lnTo>
-                    <a:pt x="736251" y="787068"/>
-                  </a:lnTo>
-                  <a:lnTo>
-                    <a:pt x="664628" y="719061"/>
-                  </a:lnTo>
-                  <a:lnTo>
-                    <a:pt x="593006" y="649339"/>
-                  </a:lnTo>
-                  <a:lnTo>
-                    <a:pt x="521383" y="577858"/>
-                  </a:lnTo>
-                  <a:lnTo>
-                    <a:pt x="449761" y="504575"/>
-                  </a:lnTo>
-                  <a:lnTo>
-                    <a:pt x="378138" y="429444"/>
-                  </a:lnTo>
-                  <a:lnTo>
-                    <a:pt x="306516" y="352418"/>
-                  </a:lnTo>
-                  <a:lnTo>
-                    <a:pt x="234893" y="273449"/>
-                  </a:lnTo>
-                  <a:lnTo>
-                    <a:pt x="163271" y="192489"/>
-                  </a:lnTo>
-                  <a:lnTo>
-                    <a:pt x="91648" y="109488"/>
-                  </a:lnTo>
-                  <a:lnTo>
-                    <a:pt x="20026" y="24393"/>
+                    <a:pt x="6655689" y="3478904"/>
+                  </a:lnTo>
+                  <a:lnTo>
+                    <a:pt x="6584067" y="3478147"/>
+                  </a:lnTo>
+                  <a:lnTo>
+                    <a:pt x="6512444" y="3477271"/>
+                  </a:lnTo>
+                  <a:lnTo>
+                    <a:pt x="6440822" y="3476258"/>
+                  </a:lnTo>
+                  <a:lnTo>
+                    <a:pt x="6369199" y="3475086"/>
+                  </a:lnTo>
+                  <a:lnTo>
+                    <a:pt x="6297576" y="3473731"/>
+                  </a:lnTo>
+                  <a:lnTo>
+                    <a:pt x="6225954" y="3472165"/>
+                  </a:lnTo>
+                  <a:lnTo>
+                    <a:pt x="6154331" y="3470353"/>
+                  </a:lnTo>
+                  <a:lnTo>
+                    <a:pt x="6082709" y="3468258"/>
+                  </a:lnTo>
+                  <a:lnTo>
+                    <a:pt x="6011086" y="3465835"/>
+                  </a:lnTo>
+                  <a:lnTo>
+                    <a:pt x="5939464" y="3463033"/>
+                  </a:lnTo>
+                  <a:lnTo>
+                    <a:pt x="5867841" y="3459793"/>
+                  </a:lnTo>
+                  <a:lnTo>
+                    <a:pt x="5796219" y="3456045"/>
+                  </a:lnTo>
+                  <a:lnTo>
+                    <a:pt x="5724596" y="3451712"/>
+                  </a:lnTo>
+                  <a:lnTo>
+                    <a:pt x="5652974" y="3446701"/>
+                  </a:lnTo>
+                  <a:lnTo>
+                    <a:pt x="5581351" y="3440906"/>
+                  </a:lnTo>
+                  <a:lnTo>
+                    <a:pt x="5509729" y="3434204"/>
+                  </a:lnTo>
+                  <a:lnTo>
+                    <a:pt x="5438106" y="3426455"/>
+                  </a:lnTo>
+                  <a:lnTo>
+                    <a:pt x="5366484" y="3417492"/>
+                  </a:lnTo>
+                  <a:lnTo>
+                    <a:pt x="5294861" y="3407128"/>
+                  </a:lnTo>
+                  <a:lnTo>
+                    <a:pt x="5223239" y="3395143"/>
+                  </a:lnTo>
+                  <a:lnTo>
+                    <a:pt x="5151616" y="3381282"/>
+                  </a:lnTo>
+                  <a:lnTo>
+                    <a:pt x="5079994" y="3365254"/>
+                  </a:lnTo>
+                  <a:lnTo>
+                    <a:pt x="5008371" y="3346718"/>
+                  </a:lnTo>
+                  <a:lnTo>
+                    <a:pt x="4936748" y="3325283"/>
+                  </a:lnTo>
+                  <a:lnTo>
+                    <a:pt x="4865126" y="3300494"/>
+                  </a:lnTo>
+                  <a:lnTo>
+                    <a:pt x="4793503" y="3271828"/>
+                  </a:lnTo>
+                  <a:lnTo>
+                    <a:pt x="4721881" y="3238677"/>
+                  </a:lnTo>
+                  <a:lnTo>
+                    <a:pt x="4650258" y="3200341"/>
+                  </a:lnTo>
+                  <a:lnTo>
+                    <a:pt x="4578636" y="3156007"/>
+                  </a:lnTo>
+                  <a:lnTo>
+                    <a:pt x="4507013" y="3104739"/>
+                  </a:lnTo>
+                  <a:lnTo>
+                    <a:pt x="4435391" y="3045450"/>
+                  </a:lnTo>
+                  <a:lnTo>
+                    <a:pt x="4363768" y="2976887"/>
+                  </a:lnTo>
+                  <a:lnTo>
+                    <a:pt x="4292146" y="2897599"/>
+                  </a:lnTo>
+                  <a:lnTo>
+                    <a:pt x="4220523" y="2805907"/>
+                  </a:lnTo>
+                  <a:lnTo>
+                    <a:pt x="4148901" y="2699872"/>
+                  </a:lnTo>
+                  <a:lnTo>
+                    <a:pt x="4077278" y="2641545"/>
+                  </a:lnTo>
+                  <a:lnTo>
+                    <a:pt x="4005656" y="2620276"/>
+                  </a:lnTo>
+                  <a:lnTo>
+                    <a:pt x="3934033" y="2598469"/>
+                  </a:lnTo>
+                  <a:lnTo>
+                    <a:pt x="3862411" y="2576112"/>
+                  </a:lnTo>
+                  <a:lnTo>
+                    <a:pt x="3790788" y="2553190"/>
+                  </a:lnTo>
+                  <a:lnTo>
+                    <a:pt x="3719166" y="2529689"/>
+                  </a:lnTo>
+                  <a:lnTo>
+                    <a:pt x="3647543" y="2505594"/>
+                  </a:lnTo>
+                  <a:lnTo>
+                    <a:pt x="3575920" y="2480892"/>
+                  </a:lnTo>
+                  <a:lnTo>
+                    <a:pt x="3504298" y="2455565"/>
+                  </a:lnTo>
+                  <a:lnTo>
+                    <a:pt x="3432675" y="2429598"/>
+                  </a:lnTo>
+                  <a:lnTo>
+                    <a:pt x="3361053" y="2402976"/>
+                  </a:lnTo>
+                  <a:lnTo>
+                    <a:pt x="3289430" y="2375682"/>
+                  </a:lnTo>
+                  <a:lnTo>
+                    <a:pt x="3217808" y="2347698"/>
+                  </a:lnTo>
+                  <a:lnTo>
+                    <a:pt x="3146185" y="2319008"/>
+                  </a:lnTo>
+                  <a:lnTo>
+                    <a:pt x="3074563" y="2289593"/>
+                  </a:lnTo>
+                  <a:lnTo>
+                    <a:pt x="3002940" y="2259435"/>
+                  </a:lnTo>
+                  <a:lnTo>
+                    <a:pt x="2931318" y="2228515"/>
+                  </a:lnTo>
+                  <a:lnTo>
+                    <a:pt x="2859695" y="2196815"/>
+                  </a:lnTo>
+                  <a:lnTo>
+                    <a:pt x="2788073" y="2164314"/>
+                  </a:lnTo>
+                  <a:lnTo>
+                    <a:pt x="2716450" y="2130992"/>
+                  </a:lnTo>
+                  <a:lnTo>
+                    <a:pt x="2644828" y="2096829"/>
+                  </a:lnTo>
+                  <a:lnTo>
+                    <a:pt x="2573205" y="2061803"/>
+                  </a:lnTo>
+                  <a:lnTo>
+                    <a:pt x="2501583" y="2025892"/>
+                  </a:lnTo>
+                  <a:lnTo>
+                    <a:pt x="2429960" y="1989075"/>
+                  </a:lnTo>
+                  <a:lnTo>
+                    <a:pt x="2358338" y="1951327"/>
+                  </a:lnTo>
+                  <a:lnTo>
+                    <a:pt x="2286715" y="1912627"/>
+                  </a:lnTo>
+                  <a:lnTo>
+                    <a:pt x="2215092" y="1872949"/>
+                  </a:lnTo>
+                  <a:lnTo>
+                    <a:pt x="2143470" y="1832269"/>
+                  </a:lnTo>
+                  <a:lnTo>
+                    <a:pt x="2071847" y="1790561"/>
+                  </a:lnTo>
+                  <a:lnTo>
+                    <a:pt x="2000225" y="1747800"/>
+                  </a:lnTo>
+                  <a:lnTo>
+                    <a:pt x="1928602" y="1703960"/>
+                  </a:lnTo>
+                  <a:lnTo>
+                    <a:pt x="1856980" y="1659012"/>
+                  </a:lnTo>
+                  <a:lnTo>
+                    <a:pt x="1785357" y="1612929"/>
+                  </a:lnTo>
+                  <a:lnTo>
+                    <a:pt x="1713735" y="1565682"/>
+                  </a:lnTo>
+                  <a:lnTo>
+                    <a:pt x="1642112" y="1517242"/>
+                  </a:lnTo>
+                  <a:lnTo>
+                    <a:pt x="1570490" y="1467579"/>
+                  </a:lnTo>
+                  <a:lnTo>
+                    <a:pt x="1498867" y="1416661"/>
+                  </a:lnTo>
+                  <a:lnTo>
+                    <a:pt x="1427245" y="1364458"/>
+                  </a:lnTo>
+                  <a:lnTo>
+                    <a:pt x="1355622" y="1310936"/>
+                  </a:lnTo>
+                  <a:lnTo>
+                    <a:pt x="1284000" y="1256062"/>
+                  </a:lnTo>
+                  <a:lnTo>
+                    <a:pt x="1212377" y="1199803"/>
+                  </a:lnTo>
+                  <a:lnTo>
+                    <a:pt x="1140755" y="1142123"/>
+                  </a:lnTo>
+                  <a:lnTo>
+                    <a:pt x="1069132" y="1082986"/>
+                  </a:lnTo>
+                  <a:lnTo>
+                    <a:pt x="997510" y="1022356"/>
+                  </a:lnTo>
+                  <a:lnTo>
+                    <a:pt x="925887" y="960195"/>
+                  </a:lnTo>
+                  <a:lnTo>
+                    <a:pt x="854264" y="896463"/>
+                  </a:lnTo>
+                  <a:lnTo>
+                    <a:pt x="782642" y="831122"/>
+                  </a:lnTo>
+                  <a:lnTo>
+                    <a:pt x="711019" y="764131"/>
+                  </a:lnTo>
+                  <a:lnTo>
+                    <a:pt x="639397" y="695449"/>
+                  </a:lnTo>
+                  <a:lnTo>
+                    <a:pt x="567774" y="625031"/>
+                  </a:lnTo>
+                  <a:lnTo>
+                    <a:pt x="496152" y="552835"/>
+                  </a:lnTo>
+                  <a:lnTo>
+                    <a:pt x="424529" y="478816"/>
+                  </a:lnTo>
+                  <a:lnTo>
+                    <a:pt x="352907" y="402928"/>
+                  </a:lnTo>
+                  <a:lnTo>
+                    <a:pt x="281284" y="325123"/>
+                  </a:lnTo>
+                  <a:lnTo>
+                    <a:pt x="209662" y="245353"/>
+                  </a:lnTo>
+                  <a:lnTo>
+                    <a:pt x="138039" y="163569"/>
+                  </a:lnTo>
+                  <a:lnTo>
+                    <a:pt x="66417" y="79719"/>
                   </a:lnTo>
                   <a:lnTo>
                     <a:pt x="0" y="0"/>
@@ -3861,177 +3855,177 @@
           </p:nvSpPr>
           <p:spPr>
             <a:xfrm>
-              <a:off x="4428660" y="2073503"/>
-              <a:ext cx="3834019" cy="3447012"/>
+              <a:off x="4449725" y="2073503"/>
+              <a:ext cx="3812953" cy="3446310"/>
             </a:xfrm>
             <a:custGeom>
               <a:avLst/>
               <a:pathLst>
-                <a:path w="3834019" h="3447012">
+                <a:path w="3812953" h="3446310">
                   <a:moveTo>
                     <a:pt x="0" y="0"/>
                   </a:moveTo>
                   <a:lnTo>
-                    <a:pt x="38025" y="156745"/>
-                  </a:lnTo>
-                  <a:lnTo>
-                    <a:pt x="109647" y="427919"/>
-                  </a:lnTo>
-                  <a:lnTo>
-                    <a:pt x="181270" y="676990"/>
-                  </a:lnTo>
-                  <a:lnTo>
-                    <a:pt x="252892" y="905761"/>
-                  </a:lnTo>
-                  <a:lnTo>
-                    <a:pt x="324515" y="1115885"/>
-                  </a:lnTo>
-                  <a:lnTo>
-                    <a:pt x="396137" y="1308883"/>
-                  </a:lnTo>
-                  <a:lnTo>
-                    <a:pt x="467760" y="1486149"/>
-                  </a:lnTo>
-                  <a:lnTo>
-                    <a:pt x="539382" y="1648968"/>
-                  </a:lnTo>
-                  <a:lnTo>
-                    <a:pt x="611005" y="1798515"/>
-                  </a:lnTo>
-                  <a:lnTo>
-                    <a:pt x="682627" y="1935874"/>
-                  </a:lnTo>
-                  <a:lnTo>
-                    <a:pt x="754250" y="2062036"/>
-                  </a:lnTo>
-                  <a:lnTo>
-                    <a:pt x="825872" y="2177916"/>
-                  </a:lnTo>
-                  <a:lnTo>
-                    <a:pt x="897495" y="2284350"/>
-                  </a:lnTo>
-                  <a:lnTo>
-                    <a:pt x="969117" y="2382109"/>
-                  </a:lnTo>
-                  <a:lnTo>
-                    <a:pt x="1040740" y="2471901"/>
-                  </a:lnTo>
-                  <a:lnTo>
-                    <a:pt x="1112363" y="2554373"/>
-                  </a:lnTo>
-                  <a:lnTo>
-                    <a:pt x="1183985" y="2630124"/>
-                  </a:lnTo>
-                  <a:lnTo>
-                    <a:pt x="1255608" y="2699700"/>
-                  </a:lnTo>
-                  <a:lnTo>
-                    <a:pt x="1327230" y="2763605"/>
-                  </a:lnTo>
-                  <a:lnTo>
-                    <a:pt x="1398853" y="2822302"/>
-                  </a:lnTo>
-                  <a:lnTo>
-                    <a:pt x="1470475" y="2876214"/>
-                  </a:lnTo>
-                  <a:lnTo>
-                    <a:pt x="1542098" y="2925733"/>
-                  </a:lnTo>
-                  <a:lnTo>
-                    <a:pt x="1613720" y="2971215"/>
-                  </a:lnTo>
-                  <a:lnTo>
-                    <a:pt x="1685343" y="3012990"/>
-                  </a:lnTo>
-                  <a:lnTo>
-                    <a:pt x="1756965" y="3051360"/>
-                  </a:lnTo>
-                  <a:lnTo>
-                    <a:pt x="1828588" y="3086602"/>
-                  </a:lnTo>
-                  <a:lnTo>
-                    <a:pt x="1900210" y="3118972"/>
-                  </a:lnTo>
-                  <a:lnTo>
-                    <a:pt x="1971833" y="3148704"/>
-                  </a:lnTo>
-                  <a:lnTo>
-                    <a:pt x="2043455" y="3176012"/>
-                  </a:lnTo>
-                  <a:lnTo>
-                    <a:pt x="2115078" y="3201095"/>
-                  </a:lnTo>
-                  <a:lnTo>
-                    <a:pt x="2186700" y="3224133"/>
-                  </a:lnTo>
-                  <a:lnTo>
-                    <a:pt x="2258323" y="3245293"/>
-                  </a:lnTo>
-                  <a:lnTo>
-                    <a:pt x="2329945" y="3264729"/>
-                  </a:lnTo>
-                  <a:lnTo>
-                    <a:pt x="2401568" y="3282580"/>
-                  </a:lnTo>
-                  <a:lnTo>
-                    <a:pt x="2473191" y="3298977"/>
-                  </a:lnTo>
-                  <a:lnTo>
-                    <a:pt x="2544813" y="3314037"/>
-                  </a:lnTo>
-                  <a:lnTo>
-                    <a:pt x="2616436" y="3327869"/>
-                  </a:lnTo>
-                  <a:lnTo>
-                    <a:pt x="2688058" y="3340575"/>
-                  </a:lnTo>
-                  <a:lnTo>
-                    <a:pt x="2759681" y="3352244"/>
-                  </a:lnTo>
-                  <a:lnTo>
-                    <a:pt x="2831303" y="3362962"/>
-                  </a:lnTo>
-                  <a:lnTo>
-                    <a:pt x="2902926" y="3372807"/>
-                  </a:lnTo>
-                  <a:lnTo>
-                    <a:pt x="2974548" y="3381849"/>
-                  </a:lnTo>
-                  <a:lnTo>
-                    <a:pt x="3046171" y="3390155"/>
-                  </a:lnTo>
-                  <a:lnTo>
-                    <a:pt x="3117793" y="3397783"/>
-                  </a:lnTo>
-                  <a:lnTo>
-                    <a:pt x="3189416" y="3404790"/>
-                  </a:lnTo>
-                  <a:lnTo>
-                    <a:pt x="3261038" y="3411225"/>
-                  </a:lnTo>
-                  <a:lnTo>
-                    <a:pt x="3332661" y="3417136"/>
-                  </a:lnTo>
-                  <a:lnTo>
-                    <a:pt x="3404283" y="3422566"/>
-                  </a:lnTo>
-                  <a:lnTo>
-                    <a:pt x="3475906" y="3427552"/>
-                  </a:lnTo>
-                  <a:lnTo>
-                    <a:pt x="3547528" y="3432132"/>
-                  </a:lnTo>
-                  <a:lnTo>
-                    <a:pt x="3619151" y="3436339"/>
-                  </a:lnTo>
-                  <a:lnTo>
-                    <a:pt x="3690773" y="3440203"/>
-                  </a:lnTo>
-                  <a:lnTo>
-                    <a:pt x="3762396" y="3443752"/>
-                  </a:lnTo>
-                  <a:lnTo>
-                    <a:pt x="3834019" y="3447012"/>
+                    <a:pt x="16959" y="71800"/>
+                  </a:lnTo>
+                  <a:lnTo>
+                    <a:pt x="88582" y="350269"/>
+                  </a:lnTo>
+                  <a:lnTo>
+                    <a:pt x="160204" y="606011"/>
+                  </a:lnTo>
+                  <a:lnTo>
+                    <a:pt x="231827" y="840881"/>
+                  </a:lnTo>
+                  <a:lnTo>
+                    <a:pt x="303450" y="1056581"/>
+                  </a:lnTo>
+                  <a:lnTo>
+                    <a:pt x="375072" y="1254676"/>
+                  </a:lnTo>
+                  <a:lnTo>
+                    <a:pt x="446695" y="1436604"/>
+                  </a:lnTo>
+                  <a:lnTo>
+                    <a:pt x="518317" y="1603684"/>
+                  </a:lnTo>
+                  <a:lnTo>
+                    <a:pt x="589940" y="1757127"/>
+                  </a:lnTo>
+                  <a:lnTo>
+                    <a:pt x="661562" y="1898047"/>
+                  </a:lnTo>
+                  <a:lnTo>
+                    <a:pt x="733185" y="2027465"/>
+                  </a:lnTo>
+                  <a:lnTo>
+                    <a:pt x="804807" y="2146321"/>
+                  </a:lnTo>
+                  <a:lnTo>
+                    <a:pt x="876430" y="2255476"/>
+                  </a:lnTo>
+                  <a:lnTo>
+                    <a:pt x="948052" y="2355723"/>
+                  </a:lnTo>
+                  <a:lnTo>
+                    <a:pt x="1019675" y="2447788"/>
+                  </a:lnTo>
+                  <a:lnTo>
+                    <a:pt x="1091297" y="2532339"/>
+                  </a:lnTo>
+                  <a:lnTo>
+                    <a:pt x="1162920" y="2609989"/>
+                  </a:lnTo>
+                  <a:lnTo>
+                    <a:pt x="1234542" y="2681301"/>
+                  </a:lnTo>
+                  <a:lnTo>
+                    <a:pt x="1306165" y="2746794"/>
+                  </a:lnTo>
+                  <a:lnTo>
+                    <a:pt x="1377787" y="2806941"/>
+                  </a:lnTo>
+                  <a:lnTo>
+                    <a:pt x="1449410" y="2862179"/>
+                  </a:lnTo>
+                  <a:lnTo>
+                    <a:pt x="1521032" y="2912909"/>
+                  </a:lnTo>
+                  <a:lnTo>
+                    <a:pt x="1592655" y="2959498"/>
+                  </a:lnTo>
+                  <a:lnTo>
+                    <a:pt x="1664278" y="3002285"/>
+                  </a:lnTo>
+                  <a:lnTo>
+                    <a:pt x="1735900" y="3041580"/>
+                  </a:lnTo>
+                  <a:lnTo>
+                    <a:pt x="1807523" y="3077668"/>
+                  </a:lnTo>
+                  <a:lnTo>
+                    <a:pt x="1879145" y="3110811"/>
+                  </a:lnTo>
+                  <a:lnTo>
+                    <a:pt x="1950768" y="3141248"/>
+                  </a:lnTo>
+                  <a:lnTo>
+                    <a:pt x="2022390" y="3169202"/>
+                  </a:lnTo>
+                  <a:lnTo>
+                    <a:pt x="2094013" y="3194873"/>
+                  </a:lnTo>
+                  <a:lnTo>
+                    <a:pt x="2165635" y="3218450"/>
+                  </a:lnTo>
+                  <a:lnTo>
+                    <a:pt x="2237258" y="3240103"/>
+                  </a:lnTo>
+                  <a:lnTo>
+                    <a:pt x="2308880" y="3259988"/>
+                  </a:lnTo>
+                  <a:lnTo>
+                    <a:pt x="2380503" y="3278250"/>
+                  </a:lnTo>
+                  <a:lnTo>
+                    <a:pt x="2452125" y="3295022"/>
+                  </a:lnTo>
+                  <a:lnTo>
+                    <a:pt x="2523748" y="3310425"/>
+                  </a:lnTo>
+                  <a:lnTo>
+                    <a:pt x="2595370" y="3324571"/>
+                  </a:lnTo>
+                  <a:lnTo>
+                    <a:pt x="2666993" y="3337562"/>
+                  </a:lnTo>
+                  <a:lnTo>
+                    <a:pt x="2738615" y="3349493"/>
+                  </a:lnTo>
+                  <a:lnTo>
+                    <a:pt x="2810238" y="3360450"/>
+                  </a:lnTo>
+                  <a:lnTo>
+                    <a:pt x="2881860" y="3370513"/>
+                  </a:lnTo>
+                  <a:lnTo>
+                    <a:pt x="2953483" y="3379755"/>
+                  </a:lnTo>
+                  <a:lnTo>
+                    <a:pt x="3025105" y="3388242"/>
+                  </a:lnTo>
+                  <a:lnTo>
+                    <a:pt x="3096728" y="3396037"/>
+                  </a:lnTo>
+                  <a:lnTo>
+                    <a:pt x="3168351" y="3403195"/>
+                  </a:lnTo>
+                  <a:lnTo>
+                    <a:pt x="3239973" y="3409770"/>
+                  </a:lnTo>
+                  <a:lnTo>
+                    <a:pt x="3311596" y="3415807"/>
+                  </a:lnTo>
+                  <a:lnTo>
+                    <a:pt x="3383218" y="3421352"/>
+                  </a:lnTo>
+                  <a:lnTo>
+                    <a:pt x="3454841" y="3426445"/>
+                  </a:lnTo>
+                  <a:lnTo>
+                    <a:pt x="3526463" y="3431121"/>
+                  </a:lnTo>
+                  <a:lnTo>
+                    <a:pt x="3598086" y="3435416"/>
+                  </a:lnTo>
+                  <a:lnTo>
+                    <a:pt x="3669708" y="3439361"/>
+                  </a:lnTo>
+                  <a:lnTo>
+                    <a:pt x="3741331" y="3442983"/>
+                  </a:lnTo>
+                  <a:lnTo>
+                    <a:pt x="3812953" y="3446310"/>
                   </a:lnTo>
                 </a:path>
               </a:pathLst>
@@ -4103,7 +4097,7 @@
           </p:nvSpPr>
           <p:spPr>
             <a:xfrm>
-              <a:off x="5636831" y="2073503"/>
+              <a:off x="5656410" y="2073503"/>
               <a:ext cx="0" cy="3649639"/>
             </a:xfrm>
             <a:custGeom>
@@ -4146,7 +4140,7 @@
           </p:nvSpPr>
           <p:spPr>
             <a:xfrm>
-              <a:off x="4328179" y="2073503"/>
+              <a:off x="4335733" y="2073503"/>
               <a:ext cx="0" cy="3649639"/>
             </a:xfrm>
             <a:custGeom>
@@ -4189,7 +4183,7 @@
           </p:nvSpPr>
           <p:spPr>
             <a:xfrm>
-              <a:off x="6683624" y="2073503"/>
+              <a:off x="6684598" y="2073503"/>
               <a:ext cx="0" cy="3649639"/>
             </a:xfrm>
             <a:custGeom>
@@ -4462,7 +4456,7 @@
           </p:nvSpPr>
           <p:spPr>
             <a:xfrm>
-              <a:off x="2970385" y="5785772"/>
+              <a:off x="2971977" y="5785772"/>
               <a:ext cx="161574" cy="80101"/>
             </a:xfrm>
             <a:prstGeom prst="rect">
@@ -4508,7 +4502,7 @@
           </p:nvSpPr>
           <p:spPr>
             <a:xfrm>
-              <a:off x="5501440" y="5785772"/>
+              <a:off x="5499574" y="5785772"/>
               <a:ext cx="62179" cy="80101"/>
             </a:xfrm>
             <a:prstGeom prst="rect">
@@ -4554,7 +4548,7 @@
           </p:nvSpPr>
           <p:spPr>
             <a:xfrm>
-              <a:off x="7951708" y="5785772"/>
+              <a:off x="7946384" y="5785772"/>
               <a:ext cx="124358" cy="80101"/>
             </a:xfrm>
             <a:prstGeom prst="rect">
@@ -4725,7 +4719,7 @@
                   <a:latin typeface="Helvetica"/>
                   <a:cs typeface="Helvetica"/>
                 </a:rPr>
-                <a:t>subHR per 10 mL/min decline: 3.25 (1.41-7.47), p_Bonf = 0.033 (n = 6)  |  per IQR decline (Δ = 23.7): 16.38 (2.27-118.28)  |  IQR: [-12.1, 11.6]</a:t>
+                <a:t>subHR per 10 mL/min decline: 3.25 (1.41-7.47), p_Bonf = 0.033 (n = 6)  |  per IQR decline (Δ = 23.7): 16.32 (2.27-117.49)  |  IQR: [-12.1, 11.6]</a:t>
               </a:r>
             </a:p>
           </p:txBody>
